--- a/public/fun/pack/pptx/reviewpro/보장점검양식프리미엄_35_사업장점검_오닉스골드.pptx
+++ b/public/fun/pack/pptx/reviewpro/보장점검양식프리미엄_35_사업장점검_오닉스골드.pptx
@@ -112,12 +112,12 @@
   <p:extLst>
     <p:ext uri="{521415D9-36F7-43E2-AB2F-B90AF26B5E84}">
       <p14:sectionLst xmlns:p14="http://schemas.microsoft.com/office/powerpoint/2010/main">
-        <p14:section name="시작" id="{633EDDF4-FA85-4DA5-9847-3C79E0318323}">
+        <p14:section name="시작" id="{8BA49C4D-BADB-4C86-AACE-92E215140575}">
           <p14:sldIdLst>
             <p14:sldId id="256"/>
           </p14:sldIdLst>
         </p14:section>
-        <p14:section name="본문" id="{533DEDE1-751C-4464-B467-DF99D6ECA446}">
+        <p14:section name="본문" id="{CFD67448-1BEC-47FF-9424-7A7AE4EC420E}">
           <p14:sldIdLst>
             <p14:sldId id="257"/>
             <p14:sldId id="258"/>
@@ -1697,7 +1697,7 @@
             </a:lvl1pPr>
           </a:lstStyle>
           <a:p>
-            <a:fld id="{4AFFBDB9-FF21-4E29-B3EC-F257EEA4C945}" type="slidenum">
+            <a:fld id="{22B0801A-7ECF-462B-ADD5-420D951C8CDC}" type="slidenum">
               <a:rPr lang="en-US"/>
               <a:t>‹#›</a:t>
             </a:fld>
@@ -2828,7 +2828,7 @@
             </a:lvl1pPr>
           </a:lstStyle>
           <a:p>
-            <a:fld id="{7641B88E-FCE5-41FC-8F30-B50845059853}" type="slidenum">
+            <a:fld id="{26B8ECD2-229C-4C0E-AB22-6E8239113E87}" type="slidenum">
               <a:rPr lang="en-US"/>
               <a:t>‹#›</a:t>
             </a:fld>
@@ -3838,7 +3838,7 @@
             </a:lvl1pPr>
           </a:lstStyle>
           <a:p>
-            <a:fld id="{029B66A5-7512-461D-8C53-C7C67E661596}" type="slidenum">
+            <a:fld id="{B3C56D7E-B780-43B4-B099-02D08547365D}" type="slidenum">
               <a:rPr lang="en-US"/>
               <a:t>‹#›</a:t>
             </a:fld>
@@ -5001,7 +5001,7 @@
           <a:p>
             <a:r>
               <a:rPr lang="ko-KR"/>
-              <a:t>사업장 점검 · 0000. 00. 00</a:t>
+              <a:t>사업장 점검 · 날짜 입력</a:t>
             </a:r>
           </a:p>
           <a:p>
@@ -5092,7 +5092,7 @@
           <a:bodyPr/>
           <a:lstStyle/>
           <a:p>
-            <a:fld id="{A12C9A4A-F7B1-4887-8A41-2D57F8AA333E}" type="slidenum">
+            <a:fld id="{F1394CE0-719B-44AF-995D-13EB83C74B02}" type="slidenum">
               <a:rPr lang="en-US"/>
               <a:t>‹#›</a:t>
             </a:fld>
@@ -5608,7 +5608,7 @@
           <a:bodyPr/>
           <a:lstStyle/>
           <a:p>
-            <a:fld id="{570E58E9-D17C-429F-9189-58CA6C652D88}" type="slidenum">
+            <a:fld id="{671F9326-BD34-4440-884D-7471119B94D0}" type="slidenum">
               <a:rPr lang="en-US"/>
               <a:t>‹#›</a:t>
             </a:fld>
@@ -7114,7 +7114,7 @@
           <a:bodyPr/>
           <a:lstStyle/>
           <a:p>
-            <a:fld id="{9D603B96-134F-4312-8B19-E05D201CBBA4}" type="slidenum">
+            <a:fld id="{3E2654B0-F965-4EF7-978A-0FE676B73CA5}" type="slidenum">
               <a:rPr lang="en-US"/>
               <a:t>‹#›</a:t>
             </a:fld>
@@ -8664,7 +8664,7 @@
           <a:bodyPr/>
           <a:lstStyle/>
           <a:p>
-            <a:fld id="{96A9F556-157B-4BE7-A862-52C092FD4D12}" type="slidenum">
+            <a:fld id="{24A0881C-3207-49E3-9C35-03A8834388CA}" type="slidenum">
               <a:rPr lang="en-US"/>
               <a:t>‹#›</a:t>
             </a:fld>
@@ -9616,7 +9616,7 @@
           <a:bodyPr/>
           <a:lstStyle/>
           <a:p>
-            <a:fld id="{EBAB2A0A-DEFB-4EF0-A098-B2D617D77EAC}" type="slidenum">
+            <a:fld id="{F3DA1F25-C0D8-400D-A63A-6DB59CD9F605}" type="slidenum">
               <a:rPr lang="en-US"/>
               <a:t>‹#›</a:t>
             </a:fld>
